--- a/classes/parte-14-grc-riesgo-y-cumplimiento/277-gestion-de-riesgos-cuantitativa-y-cualitativa/clase-277-presentacion.pptx
+++ b/classes/parte-14-grc-riesgo-y-cumplimiento/277-gestion-de-riesgos-cuantitativa-y-cualitativa/clase-277-presentacion.pptx
@@ -3255,6 +3255,51 @@
                   <a:srgbClr val="22282E"/>
                 </a:solidFill>
               </a:rPr>
+              <a:t>•  Delimita el escenario: registra activo, actor o fuente de incertidumbre, evento, efecto,</a:t>
+            </a:r>
+          </a:p>
+          <a:p>
+            <a:pPr>
+              <a:spcAft>
+                <a:spcPts val="600"/>
+              </a:spcAft>
+            </a:pPr>
+            <a:r>
+              <a:rPr sz="1500">
+                <a:solidFill>
+                  <a:srgbClr val="22282E"/>
+                </a:solidFill>
+              </a:rPr>
+              <a:t>•  horizonte y evidencia. No uses «riesgo tecnológico» como categoría única: este caso modela</a:t>
+            </a:r>
+          </a:p>
+          <a:p>
+            <a:pPr>
+              <a:spcAft>
+                <a:spcPts val="600"/>
+              </a:spcAft>
+            </a:pPr>
+            <a:r>
+              <a:rPr sz="1500">
+                <a:solidFill>
+                  <a:srgbClr val="22282E"/>
+                </a:solidFill>
+              </a:rPr>
+              <a:t>•  indisponibilidad por ransomware, no fraude, liquidez ni un fallo de modelo financiero.</a:t>
+            </a:r>
+          </a:p>
+          <a:p>
+            <a:pPr>
+              <a:spcAft>
+                <a:spcPts val="600"/>
+              </a:spcAft>
+            </a:pPr>
+            <a:r>
+              <a:rPr sz="1500">
+                <a:solidFill>
+                  <a:srgbClr val="22282E"/>
+                </a:solidFill>
+              </a:rPr>
               <a:t>•  Valora el activo (AV): estima el valor de la plataforma en 500.000 €.</a:t>
             </a:r>
           </a:p>
@@ -3286,51 +3331,6 @@
                 </a:solidFill>
               </a:rPr>
               <a:t>•  SLE: calcula SLE = 500.000 × 0,6 = 300.000 €.</a:t>
-            </a:r>
-          </a:p>
-          <a:p>
-            <a:pPr>
-              <a:spcAft>
-                <a:spcPts val="600"/>
-              </a:spcAft>
-            </a:pPr>
-            <a:r>
-              <a:rPr sz="1500">
-                <a:solidFill>
-                  <a:srgbClr val="22282E"/>
-                </a:solidFill>
-              </a:rPr>
-              <a:t>•  ARO: según incidentes del sector estimas 0,2 (uno cada 5 años). Calcula ALE = 300.000 × 0,2 = 60.000 €/año.</a:t>
-            </a:r>
-          </a:p>
-          <a:p>
-            <a:pPr>
-              <a:spcAft>
-                <a:spcPts val="600"/>
-              </a:spcAft>
-            </a:pPr>
-            <a:r>
-              <a:rPr sz="1500">
-                <a:solidFill>
-                  <a:srgbClr val="22282E"/>
-                </a:solidFill>
-              </a:rPr>
-              <a:t>•  Control propuesto: backups inmutables + EDR por 25.000 €/año, que reducen el ARO a 0,05. Nuevo ALEdespués = 300.000 × 0,05 = 15.000 €.</a:t>
-            </a:r>
-          </a:p>
-          <a:p>
-            <a:pPr>
-              <a:spcAft>
-                <a:spcPts val="600"/>
-              </a:spcAft>
-            </a:pPr>
-            <a:r>
-              <a:rPr sz="1500">
-                <a:solidFill>
-                  <a:srgbClr val="22282E"/>
-                </a:solidFill>
-              </a:rPr>
-              <a:t>•  ROSI: (60.000 − 15.000 − 25.000) / 25.000 = 0,8 → 80% de retorno. El control se justifica.</a:t>
             </a:r>
           </a:p>
         </p:txBody>
@@ -3497,6 +3497,21 @@
               <a:t>•  Diseña un Montecarlo para una brecha de datos con multa GDPR variable.</a:t>
             </a:r>
           </a:p>
+          <a:p>
+            <a:pPr>
+              <a:spcAft>
+                <a:spcPts val="600"/>
+              </a:spcAft>
+            </a:pPr>
+            <a:r>
+              <a:rPr sz="1500">
+                <a:solidFill>
+                  <a:srgbClr val="22282E"/>
+                </a:solidFill>
+              </a:rPr>
+              <a:t>•  Explica por qué revisar un contrato inteligente no basta para evaluar liquidez, reservas,</a:t>
+            </a:r>
+          </a:p>
         </p:txBody>
       </p:sp>
     </p:spTree>
@@ -3750,6 +3765,36 @@
               <a:t>•  Ignorar el riesgo residual — Documenta y acepta formalmente lo que queda</a:t>
             </a:r>
           </a:p>
+          <a:p>
+            <a:pPr>
+              <a:spcAft>
+                <a:spcPts val="600"/>
+              </a:spcAft>
+            </a:pPr>
+            <a:r>
+              <a:rPr sz="1500">
+                <a:solidFill>
+                  <a:srgbClr val="22282E"/>
+                </a:solidFill>
+              </a:rPr>
+              <a:t>•  Clasificar un de-peg como «hackeo» sin evidencia — Se confundió el efecto con la causa; abre hipótesis separadas y exige artefactos específicos</a:t>
+            </a:r>
+          </a:p>
+          <a:p>
+            <a:pPr>
+              <a:spcAft>
+                <a:spcPts val="600"/>
+              </a:spcAft>
+            </a:pPr>
+            <a:r>
+              <a:rPr sz="1500">
+                <a:solidFill>
+                  <a:srgbClr val="22282E"/>
+                </a:solidFill>
+              </a:rPr>
+              <a:t>•  Usar «blockchain» como garantía de estabilidad — La integridad de ciertas transacciones no elimina riesgo de mercado, liquidez, modelo o gobierno</a:t>
+            </a:r>
+          </a:p>
         </p:txBody>
       </p:sp>
     </p:spTree>
@@ -4061,6 +4106,21 @@
                 </a:solidFill>
               </a:rPr>
               <a:t>•  Verizon Data Breach Investigations Report (DBIR). &lt;https://www.verizon.com/business/resources/reports/dbir/&gt;</a:t>
+            </a:r>
+          </a:p>
+          <a:p>
+            <a:pPr>
+              <a:spcAft>
+                <a:spcPts val="600"/>
+              </a:spcAft>
+            </a:pPr>
+            <a:r>
+              <a:rPr sz="1500">
+                <a:solidFill>
+                  <a:srgbClr val="22282E"/>
+                </a:solidFill>
+              </a:rPr>
+              <a:t>•  U.S. Securities and Exchange Commission — acuerdo posterior al veredicto contra Terraform Labs y Do Kwon (2024); respalda el estado judicial y las afirmaciones sobre UST y el uso declarado de la…</a:t>
             </a:r>
           </a:p>
           <a:p>
@@ -4406,6 +4466,21 @@
               <a:t>•  Elegir el tratamiento adecuado: mitigar, transferir, evitar o aceptar.</a:t>
             </a:r>
           </a:p>
+          <a:p>
+            <a:pPr>
+              <a:spcAft>
+                <a:spcPts val="600"/>
+              </a:spcAft>
+            </a:pPr>
+            <a:r>
+              <a:rPr sz="1500">
+                <a:solidFill>
+                  <a:srgbClr val="22282E"/>
+                </a:solidFill>
+              </a:rPr>
+              <a:t>•  Separar riesgo de ciberseguridad, riesgo económico y de modelo, riesgo de liquidez, incumplimiento y alegaciones de fraude antes de seleccionar controles.</a:t>
+            </a:r>
+          </a:p>
         </p:txBody>
       </p:sp>
     </p:spTree>
@@ -4689,6 +4764,81 @@
               <a:t>•  Dos riesgos quedan «altos» en una matriz. Uno puede interrumpir ventas por horas; otro generar daño regulatorio de cola larga. Rangos y escenarios separan decisiones. El resultado se presenta como…</a:t>
             </a:r>
           </a:p>
+          <a:p>
+            <a:pPr>
+              <a:spcAft>
+                <a:spcPts val="600"/>
+              </a:spcAft>
+            </a:pPr>
+            <a:r>
+              <a:rPr sz="1500">
+                <a:solidFill>
+                  <a:srgbClr val="22282E"/>
+                </a:solidFill>
+              </a:rPr>
+              <a:t>•  TerraUSD (UST) es un contraste útil porque su colapso no debe reescribirse como «hackeo». La SEC</a:t>
+            </a:r>
+          </a:p>
+          <a:p>
+            <a:pPr>
+              <a:spcAft>
+                <a:spcPts val="600"/>
+              </a:spcAft>
+            </a:pPr>
+            <a:r>
+              <a:rPr sz="1500">
+                <a:solidFill>
+                  <a:srgbClr val="22282E"/>
+                </a:solidFill>
+              </a:rPr>
+              <a:t>•  describió UST como una supuesta stablecoin algorítmica y, después de un veredicto unánime por</a:t>
+            </a:r>
+          </a:p>
+          <a:p>
+            <a:pPr>
+              <a:spcAft>
+                <a:spcPts val="600"/>
+              </a:spcAft>
+            </a:pPr>
+            <a:r>
+              <a:rPr sz="1500">
+                <a:solidFill>
+                  <a:srgbClr val="22282E"/>
+                </a:solidFill>
+              </a:rPr>
+              <a:t>•  fraude de valores, informó en 2024 del acuerdo y de las declaraciones falsas sobre la estabilidad de</a:t>
+            </a:r>
+          </a:p>
+          <a:p>
+            <a:pPr>
+              <a:spcAft>
+                <a:spcPts val="600"/>
+              </a:spcAft>
+            </a:pPr>
+            <a:r>
+              <a:rPr sz="1500">
+                <a:solidFill>
+                  <a:srgbClr val="22282E"/>
+                </a:solidFill>
+              </a:rPr>
+              <a:t>•  UST y el uso de la blockchain de Terraform para liquidar transacciones. Esa fuente establece el</a:t>
+            </a:r>
+          </a:p>
+          <a:p>
+            <a:pPr>
+              <a:spcAft>
+                <a:spcPts val="600"/>
+              </a:spcAft>
+            </a:pPr>
+            <a:r>
+              <a:rPr sz="1500">
+                <a:solidFill>
+                  <a:srgbClr val="22282E"/>
+                </a:solidFill>
+              </a:rPr>
+              <a:t>•  resultado del litigio que documenta; no identifica por sí misma una CVE, malware, credencial robada</a:t>
+            </a:r>
+          </a:p>
         </p:txBody>
       </p:sp>
     </p:spTree>
@@ -4821,6 +4971,36 @@
                 </a:solidFill>
               </a:rPr>
               <a:t>•  Sensibilidad — Cambio del resultado al variar un supuesto.</a:t>
+            </a:r>
+          </a:p>
+          <a:p>
+            <a:pPr>
+              <a:spcAft>
+                <a:spcPts val="600"/>
+              </a:spcAft>
+            </a:pPr>
+            <a:r>
+              <a:rPr sz="1500">
+                <a:solidFill>
+                  <a:srgbClr val="22282E"/>
+                </a:solidFill>
+              </a:rPr>
+              <a:t>•  Riesgo de modelo — Pérdida por supuestos, relaciones o implementación inadecuados para la decisión modelada.</a:t>
+            </a:r>
+          </a:p>
+          <a:p>
+            <a:pPr>
+              <a:spcAft>
+                <a:spcPts val="600"/>
+              </a:spcAft>
+            </a:pPr>
+            <a:r>
+              <a:rPr sz="1500">
+                <a:solidFill>
+                  <a:srgbClr val="22282E"/>
+                </a:solidFill>
+              </a:rPr>
+              <a:t>•  Evento observable — Hecho medido; requiere análisis adicional antes de atribuir causa, intención o categoría de riesgo.</a:t>
             </a:r>
           </a:p>
         </p:txBody>

--- a/classes/parte-14-grc-riesgo-y-cumplimiento/277-gestion-de-riesgos-cuantitativa-y-cualitativa/clase-277-presentacion.pptx
+++ b/classes/parte-14-grc-riesgo-y-cumplimiento/277-gestion-de-riesgos-cuantitativa-y-cualitativa/clase-277-presentacion.pptx
@@ -4135,6 +4135,21 @@
                   <a:srgbClr val="22282E"/>
                 </a:solidFill>
               </a:rPr>
+              <a:t>•  U.S. Securities and Exchange Commission — litigio sobre Game Coin (2025); respalda el mecanismo alegado de control de LP tokens y retiro de liquidez, no una conclusión sobre otros proyectos.…</a:t>
+            </a:r>
+          </a:p>
+          <a:p>
+            <a:pPr>
+              <a:spcAft>
+                <a:spcPts val="600"/>
+              </a:spcAft>
+            </a:pPr>
+            <a:r>
+              <a:rPr sz="1500">
+                <a:solidFill>
+                  <a:srgbClr val="22282E"/>
+                </a:solidFill>
+              </a:rPr>
               <a:t>•  (ISC)² CISSP Official Study Guide, dominio 1.</a:t>
             </a:r>
           </a:p>
@@ -5001,6 +5016,21 @@
                 </a:solidFill>
               </a:rPr>
               <a:t>•  Evento observable — Hecho medido; requiere análisis adicional antes de atribuir causa, intención o categoría de riesgo.</a:t>
+            </a:r>
+          </a:p>
+          <a:p>
+            <a:pPr>
+              <a:spcAft>
+                <a:spcPts val="600"/>
+              </a:spcAft>
+            </a:pPr>
+            <a:r>
+              <a:rPr sz="1500">
+                <a:solidFill>
+                  <a:srgbClr val="22282E"/>
+                </a:solidFill>
+              </a:rPr>
+              <a:t>•  Riesgo de promotor — Pérdida por privilegios, concentración o conducta de quienes controlan el proyecto.</a:t>
             </a:r>
           </a:p>
         </p:txBody>
